--- a/claude-code-tutorial/claude-code-tutorial.pptx
+++ b/claude-code-tutorial/claude-code-tutorial.pptx
@@ -822,7 +822,7 @@
           <a:lstStyle/>
           <a:p>
             <a:r>
-              <a:t>This is the roadmap for Parts 3 and 4. Each spoke is a way to shape the harness. One we will not give its own slide: subagents — a scoped helper (say, a reviewer that can only read) that keeps your main session focused. You meet all of these in the lab.</a:t>
+              <a:t>This is the roadmap for Parts 3 and 4. Each spoke is a way to shape the harness. One we will not give its own slide: subagents — a scoped helper (say, a reviewer that can only read) that keeps your main session focused. The lab exercises memory, permissions, commands, skills, and MCP; subagents and hooks are covered here in the deck.</a:t>
             </a:r>
           </a:p>
         </p:txBody>
@@ -6456,7 +6456,7 @@
           </a:bodyPr>
           <a:lstStyle/>
           <a:p>
-            <a:pPr>
+            <a:pPr marL="219456" indent="-219456">
               <a:lnSpc>
                 <a:spcPct val="106000"/>
               </a:lnSpc>
@@ -6502,7 +6502,7 @@
             </a:r>
           </a:p>
           <a:p>
-            <a:pPr>
+            <a:pPr marL="219456" indent="-219456">
               <a:lnSpc>
                 <a:spcPct val="106000"/>
               </a:lnSpc>
@@ -6575,7 +6575,7 @@
             </a:r>
           </a:p>
           <a:p>
-            <a:pPr>
+            <a:pPr marL="219456" indent="-219456">
               <a:lnSpc>
                 <a:spcPct val="106000"/>
               </a:lnSpc>
@@ -6713,7 +6713,7 @@
           </a:bodyPr>
           <a:lstStyle/>
           <a:p>
-            <a:pPr>
+            <a:pPr marL="219456" indent="-219456">
               <a:lnSpc>
                 <a:spcPct val="106000"/>
               </a:lnSpc>
@@ -6741,7 +6741,7 @@
             </a:r>
           </a:p>
           <a:p>
-            <a:pPr>
+            <a:pPr marL="219456" indent="-219456">
               <a:lnSpc>
                 <a:spcPct val="106000"/>
               </a:lnSpc>
@@ -6769,7 +6769,7 @@
             </a:r>
           </a:p>
           <a:p>
-            <a:pPr>
+            <a:pPr marL="219456" indent="-219456">
               <a:lnSpc>
                 <a:spcPct val="106000"/>
               </a:lnSpc>
@@ -7654,8 +7654,8 @@
         </p:nvSpPr>
         <p:spPr>
           <a:xfrm>
-            <a:off x="548640" y="1417320"/>
-            <a:ext cx="8046720" cy="3264408"/>
+            <a:off x="548640" y="1673352"/>
+            <a:ext cx="8046720" cy="3008376"/>
           </a:xfrm>
           <a:prstGeom prst="rect">
             <a:avLst/>
@@ -7663,12 +7663,12 @@
           <a:noFill/>
         </p:spPr>
         <p:txBody>
-          <a:bodyPr wrap="square" anchor="ctr" lIns="0" rIns="0" tIns="0" bIns="0">
+          <a:bodyPr wrap="square" anchor="t" lIns="0" rIns="0" tIns="0" bIns="0">
             <a:spAutoFit/>
           </a:bodyPr>
           <a:lstStyle/>
           <a:p>
-            <a:pPr>
+            <a:pPr marL="274320" indent="-274320">
               <a:lnSpc>
                 <a:spcPct val="108000"/>
               </a:lnSpc>
@@ -7710,11 +7710,11 @@
                 </a:solidFill>
                 <a:latin typeface="Arial"/>
               </a:rPr>
-              <a:t>cycles how much it may do on its own — from ask-first, to read-only plan, to auto-edit.</a:t>
-            </a:r>
-          </a:p>
-          <a:p>
-            <a:pPr>
+              <a:t>cycles the permission mode — ask-first, then auto-edit, then read-only plan.</a:t>
+            </a:r>
+          </a:p>
+          <a:p>
+            <a:pPr marL="274320" indent="-274320">
               <a:lnSpc>
                 <a:spcPct val="108000"/>
               </a:lnSpc>
@@ -7760,7 +7760,7 @@
             </a:r>
           </a:p>
           <a:p>
-            <a:pPr>
+            <a:pPr marL="274320" indent="-274320">
               <a:lnSpc>
                 <a:spcPct val="108000"/>
               </a:lnSpc>
@@ -7802,7 +7802,7 @@
                 </a:solidFill>
                 <a:latin typeface="Arial"/>
               </a:rPr>
-              <a:t>check spend, start a fresh context, or list every command.</a:t>
+              <a:t>check spend, clear its memory for a fresh start, or list every command.</a:t>
             </a:r>
           </a:p>
         </p:txBody>
@@ -8509,8 +8509,8 @@
         </p:nvSpPr>
         <p:spPr>
           <a:xfrm>
-            <a:off x="548640" y="1755648"/>
-            <a:ext cx="8046720" cy="2926080"/>
+            <a:off x="548640" y="2011680"/>
+            <a:ext cx="8046720" cy="2670048"/>
           </a:xfrm>
           <a:prstGeom prst="rect">
             <a:avLst/>
@@ -8518,12 +8518,12 @@
           <a:noFill/>
         </p:spPr>
         <p:txBody>
-          <a:bodyPr wrap="square" anchor="ctr" lIns="0" rIns="0" tIns="0" bIns="0">
+          <a:bodyPr wrap="square" anchor="t" lIns="0" rIns="0" tIns="0" bIns="0">
             <a:spAutoFit/>
           </a:bodyPr>
           <a:lstStyle/>
           <a:p>
-            <a:pPr>
+            <a:pPr marL="274320" indent="-274320">
               <a:lnSpc>
                 <a:spcPct val="108000"/>
               </a:lnSpc>
@@ -8569,7 +8569,7 @@
             </a:r>
           </a:p>
           <a:p>
-            <a:pPr>
+            <a:pPr marL="274320" indent="-274320">
               <a:lnSpc>
                 <a:spcPct val="108000"/>
               </a:lnSpc>
@@ -8624,7 +8624,7 @@
             </a:r>
           </a:p>
           <a:p>
-            <a:pPr>
+            <a:pPr marL="274320" indent="-274320">
               <a:lnSpc>
                 <a:spcPct val="108000"/>
               </a:lnSpc>
@@ -9416,7 +9416,7 @@
                 </a:solidFill>
                 <a:latin typeface="Arial"/>
               </a:rPr>
-              <a:t>turn one command into a batch over thousands of inputs.</a:t>
+              <a:t>turn one command into a batch, and connect your own cluster tools.</a:t>
             </a:r>
           </a:p>
         </p:txBody>
@@ -9701,7 +9701,7 @@
                 </a:solidFill>
                 <a:latin typeface="Arial"/>
               </a:rPr>
-              <a:t>You do not call it — the model loads it when your request matches its description.</a:t>
+              <a:t>You do not call a skill — the model reaches for it when your request matches its description.</a:t>
             </a:r>
           </a:p>
         </p:txBody>
@@ -10392,7 +10392,7 @@
                           </a:solidFill>
                           <a:latin typeface="Arial"/>
                         </a:rPr>
-                        <a:t>Plan</a:t>
+                        <a:t>Accept edits</a:t>
                       </a:r>
                     </a:p>
                   </a:txBody>
@@ -10415,7 +10415,7 @@
                           </a:solidFill>
                           <a:latin typeface="Arial"/>
                         </a:rPr>
-                        <a:t>Read-only — it proposes changes but makes none</a:t>
+                        <a:t>Approves its own edits inside the current folder</a:t>
                       </a:r>
                     </a:p>
                   </a:txBody>
@@ -10440,7 +10440,7 @@
                           </a:solidFill>
                           <a:latin typeface="Arial"/>
                         </a:rPr>
-                        <a:t>Accept edits</a:t>
+                        <a:t>Plan</a:t>
                       </a:r>
                     </a:p>
                   </a:txBody>
@@ -10463,7 +10463,7 @@
                           </a:solidFill>
                           <a:latin typeface="Arial"/>
                         </a:rPr>
-                        <a:t>Approves its own edits inside the current folder</a:t>
+                        <a:t>Read-only — it proposes changes but makes none</a:t>
                       </a:r>
                     </a:p>
                   </a:txBody>
@@ -11288,8 +11288,8 @@
         </p:nvSpPr>
         <p:spPr>
           <a:xfrm>
-            <a:off x="548640" y="1417320"/>
-            <a:ext cx="8046720" cy="3264408"/>
+            <a:off x="548640" y="1673352"/>
+            <a:ext cx="8046720" cy="3008376"/>
           </a:xfrm>
           <a:prstGeom prst="rect">
             <a:avLst/>
@@ -11297,12 +11297,12 @@
           <a:noFill/>
         </p:spPr>
         <p:txBody>
-          <a:bodyPr wrap="square" anchor="ctr" lIns="0" rIns="0" tIns="0" bIns="0">
+          <a:bodyPr wrap="square" anchor="t" lIns="0" rIns="0" tIns="0" bIns="0">
             <a:spAutoFit/>
           </a:bodyPr>
           <a:lstStyle/>
           <a:p>
-            <a:pPr>
+            <a:pPr marL="274320" indent="-274320">
               <a:lnSpc>
                 <a:spcPct val="108000"/>
               </a:lnSpc>
@@ -11348,7 +11348,7 @@
             </a:r>
           </a:p>
           <a:p>
-            <a:pPr>
+            <a:pPr marL="274320" indent="-274320">
               <a:lnSpc>
                 <a:spcPct val="108000"/>
               </a:lnSpc>
@@ -11430,7 +11430,7 @@
             </a:r>
           </a:p>
           <a:p>
-            <a:pPr>
+            <a:pPr marL="274320" indent="-274320">
               <a:lnSpc>
                 <a:spcPct val="108000"/>
               </a:lnSpc>
@@ -11715,7 +11715,7 @@
                 </a:solidFill>
                 <a:latin typeface="Arial"/>
               </a:rPr>
-              <a:t>From one command to a batch over thousands of inputs.</a:t>
+              <a:t>From one command to a batch — and out to your own cluster tools.</a:t>
             </a:r>
           </a:p>
         </p:txBody>
@@ -12677,7 +12677,7 @@
                 </a:solidFill>
                 <a:latin typeface="Arial"/>
               </a:rPr>
-              <a:t>An open standard — the same tool server works in any MCP-aware app, not only Claude Code.</a:t>
+              <a:t>The Model Context Protocol (MCP) is an open standard — the same tool server works in any MCP-aware app.</a:t>
             </a:r>
           </a:p>
         </p:txBody>
@@ -13210,8 +13210,8 @@
         </p:nvSpPr>
         <p:spPr>
           <a:xfrm>
-            <a:off x="548640" y="1417320"/>
-            <a:ext cx="8046720" cy="3264408"/>
+            <a:off x="548640" y="1673352"/>
+            <a:ext cx="8046720" cy="3008376"/>
           </a:xfrm>
           <a:prstGeom prst="rect">
             <a:avLst/>
@@ -13219,12 +13219,12 @@
           <a:noFill/>
         </p:spPr>
         <p:txBody>
-          <a:bodyPr wrap="square" anchor="ctr" lIns="0" rIns="0" tIns="0" bIns="0">
+          <a:bodyPr wrap="square" anchor="t" lIns="0" rIns="0" tIns="0" bIns="0">
             <a:spAutoFit/>
           </a:bodyPr>
           <a:lstStyle/>
           <a:p>
-            <a:pPr>
+            <a:pPr marL="274320" indent="-274320">
               <a:lnSpc>
                 <a:spcPct val="108000"/>
               </a:lnSpc>
@@ -13270,7 +13270,7 @@
             </a:r>
           </a:p>
           <a:p>
-            <a:pPr>
+            <a:pPr marL="274320" indent="-274320">
               <a:lnSpc>
                 <a:spcPct val="108000"/>
               </a:lnSpc>
@@ -13490,8 +13490,8 @@
         </p:nvSpPr>
         <p:spPr>
           <a:xfrm>
-            <a:off x="548640" y="1417320"/>
-            <a:ext cx="8046720" cy="3264408"/>
+            <a:off x="548640" y="1673352"/>
+            <a:ext cx="8046720" cy="3008376"/>
           </a:xfrm>
           <a:prstGeom prst="rect">
             <a:avLst/>
@@ -13499,12 +13499,12 @@
           <a:noFill/>
         </p:spPr>
         <p:txBody>
-          <a:bodyPr wrap="square" anchor="ctr" lIns="0" rIns="0" tIns="0" bIns="0">
+          <a:bodyPr wrap="square" anchor="t" lIns="0" rIns="0" tIns="0" bIns="0">
             <a:spAutoFit/>
           </a:bodyPr>
           <a:lstStyle/>
           <a:p>
-            <a:pPr>
+            <a:pPr marL="274320" indent="-274320">
               <a:lnSpc>
                 <a:spcPct val="108000"/>
               </a:lnSpc>
@@ -13550,7 +13550,7 @@
             </a:r>
           </a:p>
           <a:p>
-            <a:pPr>
+            <a:pPr marL="274320" indent="-274320">
               <a:lnSpc>
                 <a:spcPct val="108000"/>
               </a:lnSpc>
@@ -13596,7 +13596,7 @@
             </a:r>
           </a:p>
           <a:p>
-            <a:pPr>
+            <a:pPr marL="274320" indent="-274320">
               <a:lnSpc>
                 <a:spcPct val="108000"/>
               </a:lnSpc>
@@ -13816,8 +13816,8 @@
         </p:nvSpPr>
         <p:spPr>
           <a:xfrm>
-            <a:off x="548640" y="1417320"/>
-            <a:ext cx="8046720" cy="3264408"/>
+            <a:off x="548640" y="1673352"/>
+            <a:ext cx="8046720" cy="3008376"/>
           </a:xfrm>
           <a:prstGeom prst="rect">
             <a:avLst/>
@@ -13825,12 +13825,12 @@
           <a:noFill/>
         </p:spPr>
         <p:txBody>
-          <a:bodyPr wrap="square" anchor="ctr" lIns="0" rIns="0" tIns="0" bIns="0">
+          <a:bodyPr wrap="square" anchor="t" lIns="0" rIns="0" tIns="0" bIns="0">
             <a:spAutoFit/>
           </a:bodyPr>
           <a:lstStyle/>
           <a:p>
-            <a:pPr>
+            <a:pPr marL="274320" indent="-274320">
               <a:lnSpc>
                 <a:spcPct val="108000"/>
               </a:lnSpc>
@@ -13876,7 +13876,7 @@
             </a:r>
           </a:p>
           <a:p>
-            <a:pPr>
+            <a:pPr marL="274320" indent="-274320">
               <a:lnSpc>
                 <a:spcPct val="108000"/>
               </a:lnSpc>
@@ -13922,7 +13922,7 @@
             </a:r>
           </a:p>
           <a:p>
-            <a:pPr>
+            <a:pPr marL="274320" indent="-274320">
               <a:lnSpc>
                 <a:spcPct val="108000"/>
               </a:lnSpc>
@@ -14473,8 +14473,8 @@
         </p:nvSpPr>
         <p:spPr>
           <a:xfrm>
-            <a:off x="548640" y="1755648"/>
-            <a:ext cx="8046720" cy="2926080"/>
+            <a:off x="548640" y="2011680"/>
+            <a:ext cx="8046720" cy="2670048"/>
           </a:xfrm>
           <a:prstGeom prst="rect">
             <a:avLst/>
@@ -14482,12 +14482,12 @@
           <a:noFill/>
         </p:spPr>
         <p:txBody>
-          <a:bodyPr wrap="square" anchor="ctr" lIns="0" rIns="0" tIns="0" bIns="0">
+          <a:bodyPr wrap="square" anchor="t" lIns="0" rIns="0" tIns="0" bIns="0">
             <a:spAutoFit/>
           </a:bodyPr>
           <a:lstStyle/>
           <a:p>
-            <a:pPr>
+            <a:pPr marL="274320" indent="-274320">
               <a:lnSpc>
                 <a:spcPct val="108000"/>
               </a:lnSpc>
@@ -14511,7 +14511,7 @@
                 </a:solidFill>
                 <a:latin typeface="Arial"/>
               </a:rPr>
-              <a:t>Open Claude Code inside it.</a:t>
+              <a:t>Open it on a scratch copy.</a:t>
             </a:r>
             <a:r>
               <a:rPr sz="1500" b="0" i="0">
@@ -14525,11 +14525,20 @@
             <a:r>
               <a:rPr sz="1500" b="0" i="0">
                 <a:solidFill>
+                  <a:srgbClr val="1E2126"/>
+                </a:solidFill>
+                <a:latin typeface="Arial"/>
+              </a:rPr>
+              <a:t>Copy </a:t>
+            </a:r>
+            <a:r>
+              <a:rPr sz="1500" b="0" i="0">
+                <a:solidFill>
                   <a:srgbClr val="007482"/>
                 </a:solidFill>
                 <a:latin typeface="Arial"/>
               </a:rPr>
-              <a:t>cd hands-on/project &amp;&amp; claude</a:t>
+              <a:t>hands-on/project</a:t>
             </a:r>
             <a:r>
               <a:rPr sz="1500" b="0" i="0">
@@ -14538,11 +14547,29 @@
                 </a:solidFill>
                 <a:latin typeface="Arial"/>
               </a:rPr>
-              <a:t> — no notebook to run; you drive the agent directly.</a:t>
-            </a:r>
-          </a:p>
-          <a:p>
-            <a:pPr>
+              <a:t> to a clean dir, start </a:t>
+            </a:r>
+            <a:r>
+              <a:rPr sz="1500" b="0" i="0">
+                <a:solidFill>
+                  <a:srgbClr val="007482"/>
+                </a:solidFill>
+                <a:latin typeface="Arial"/>
+              </a:rPr>
+              <a:t>claude</a:t>
+            </a:r>
+            <a:r>
+              <a:rPr sz="1500" b="0" i="0">
+                <a:solidFill>
+                  <a:srgbClr val="1E2126"/>
+                </a:solidFill>
+                <a:latin typeface="Arial"/>
+              </a:rPr>
+              <a:t> there, and drive the agent — no notebook to run.</a:t>
+            </a:r>
+          </a:p>
+          <a:p>
+            <a:pPr marL="274320" indent="-274320">
               <a:lnSpc>
                 <a:spcPct val="108000"/>
               </a:lnSpc>
@@ -14606,7 +14633,7 @@
             </a:r>
           </a:p>
           <a:p>
-            <a:pPr>
+            <a:pPr marL="274320" indent="-274320">
               <a:lnSpc>
                 <a:spcPct val="108000"/>
               </a:lnSpc>
@@ -14913,7 +14940,7 @@
                           </a:solidFill>
                           <a:latin typeface="Arial"/>
                         </a:rPr>
-                        <a:t>You will practise</a:t>
+                        <a:t>You will practice</a:t>
                       </a:r>
                     </a:p>
                   </a:txBody>
@@ -15130,7 +15157,7 @@
                           </a:solidFill>
                           <a:latin typeface="Arial"/>
                         </a:rPr>
-                        <a:t>5 · Notes into a table</a:t>
+                        <a:t>5 · Turn notes into data</a:t>
                       </a:r>
                     </a:p>
                   </a:txBody>
@@ -15355,8 +15382,8 @@
         </p:nvSpPr>
         <p:spPr>
           <a:xfrm>
-            <a:off x="548640" y="1417320"/>
-            <a:ext cx="8046720" cy="3264408"/>
+            <a:off x="548640" y="1673352"/>
+            <a:ext cx="8046720" cy="3008376"/>
           </a:xfrm>
           <a:prstGeom prst="rect">
             <a:avLst/>
@@ -15364,12 +15391,12 @@
           <a:noFill/>
         </p:spPr>
         <p:txBody>
-          <a:bodyPr wrap="square" anchor="ctr" lIns="0" rIns="0" tIns="0" bIns="0">
+          <a:bodyPr wrap="square" anchor="t" lIns="0" rIns="0" tIns="0" bIns="0">
             <a:spAutoFit/>
           </a:bodyPr>
           <a:lstStyle/>
           <a:p>
-            <a:pPr>
+            <a:pPr marL="274320" indent="-274320">
               <a:lnSpc>
                 <a:spcPct val="108000"/>
               </a:lnSpc>
@@ -15415,7 +15442,7 @@
             </a:r>
           </a:p>
           <a:p>
-            <a:pPr>
+            <a:pPr marL="274320" indent="-274320">
               <a:lnSpc>
                 <a:spcPct val="108000"/>
               </a:lnSpc>
@@ -15461,7 +15488,7 @@
             </a:r>
           </a:p>
           <a:p>
-            <a:pPr>
+            <a:pPr marL="274320" indent="-274320">
               <a:lnSpc>
                 <a:spcPct val="108000"/>
               </a:lnSpc>
@@ -15590,7 +15617,7 @@
                 </a:solidFill>
                 <a:latin typeface="Arial"/>
               </a:rPr>
-              <a:t>References  (1 of 2)</a:t>
+              <a:t>References (1 of 2)</a:t>
             </a:r>
           </a:p>
         </p:txBody>
@@ -16264,7 +16291,7 @@
                 </a:solidFill>
                 <a:latin typeface="Arial"/>
               </a:rPr>
-              <a:t>References  (2 of 2)</a:t>
+              <a:t>References (2 of 2)</a:t>
             </a:r>
           </a:p>
         </p:txBody>
@@ -17171,8 +17198,8 @@
         </p:nvSpPr>
         <p:spPr>
           <a:xfrm>
-            <a:off x="548640" y="1755648"/>
-            <a:ext cx="8046720" cy="2926080"/>
+            <a:off x="548640" y="2011680"/>
+            <a:ext cx="8046720" cy="2670048"/>
           </a:xfrm>
           <a:prstGeom prst="rect">
             <a:avLst/>
@@ -17180,12 +17207,12 @@
           <a:noFill/>
         </p:spPr>
         <p:txBody>
-          <a:bodyPr wrap="square" anchor="ctr" lIns="0" rIns="0" tIns="0" bIns="0">
+          <a:bodyPr wrap="square" anchor="t" lIns="0" rIns="0" tIns="0" bIns="0">
             <a:spAutoFit/>
           </a:bodyPr>
           <a:lstStyle/>
           <a:p>
-            <a:pPr>
+            <a:pPr marL="274320" indent="-274320">
               <a:lnSpc>
                 <a:spcPct val="108000"/>
               </a:lnSpc>
@@ -17231,7 +17258,7 @@
             </a:r>
           </a:p>
           <a:p>
-            <a:pPr>
+            <a:pPr marL="274320" indent="-274320">
               <a:lnSpc>
                 <a:spcPct val="108000"/>
               </a:lnSpc>
@@ -17277,7 +17304,7 @@
             </a:r>
           </a:p>
           <a:p>
-            <a:pPr>
+            <a:pPr marL="274320" indent="-274320">
               <a:lnSpc>
                 <a:spcPct val="108000"/>
               </a:lnSpc>
@@ -17875,8 +17902,8 @@
         </p:nvSpPr>
         <p:spPr>
           <a:xfrm>
-            <a:off x="548640" y="1417320"/>
-            <a:ext cx="8046720" cy="3264408"/>
+            <a:off x="548640" y="1673352"/>
+            <a:ext cx="8046720" cy="3008376"/>
           </a:xfrm>
           <a:prstGeom prst="rect">
             <a:avLst/>
@@ -17884,12 +17911,12 @@
           <a:noFill/>
         </p:spPr>
         <p:txBody>
-          <a:bodyPr wrap="square" anchor="ctr" lIns="0" rIns="0" tIns="0" bIns="0">
+          <a:bodyPr wrap="square" anchor="t" lIns="0" rIns="0" tIns="0" bIns="0">
             <a:spAutoFit/>
           </a:bodyPr>
           <a:lstStyle/>
           <a:p>
-            <a:pPr>
+            <a:pPr marL="274320" indent="-274320">
               <a:lnSpc>
                 <a:spcPct val="108000"/>
               </a:lnSpc>
@@ -17935,7 +17962,7 @@
             </a:r>
           </a:p>
           <a:p>
-            <a:pPr>
+            <a:pPr marL="274320" indent="-274320">
               <a:lnSpc>
                 <a:spcPct val="108000"/>
               </a:lnSpc>
@@ -17981,7 +18008,7 @@
             </a:r>
           </a:p>
           <a:p>
-            <a:pPr>
+            <a:pPr marL="274320" indent="-274320">
               <a:lnSpc>
                 <a:spcPct val="108000"/>
               </a:lnSpc>
@@ -18023,7 +18050,7 @@
                 </a:solidFill>
                 <a:latin typeface="Arial"/>
               </a:rPr>
-              <a:t>A test, an exit code, or a linter confirms a change actually worked.</a:t>
+              <a:t>A test passing, a program finishing cleanly, or a code checker confirms the change worked.</a:t>
             </a:r>
           </a:p>
         </p:txBody>
@@ -18167,8 +18194,8 @@
         </p:nvSpPr>
         <p:spPr>
           <a:xfrm>
-            <a:off x="548640" y="1417320"/>
-            <a:ext cx="8046720" cy="3264408"/>
+            <a:off x="548640" y="1673352"/>
+            <a:ext cx="8046720" cy="3008376"/>
           </a:xfrm>
           <a:prstGeom prst="rect">
             <a:avLst/>
@@ -18176,12 +18203,12 @@
           <a:noFill/>
         </p:spPr>
         <p:txBody>
-          <a:bodyPr wrap="square" anchor="ctr" lIns="0" rIns="0" tIns="0" bIns="0">
+          <a:bodyPr wrap="square" anchor="t" lIns="0" rIns="0" tIns="0" bIns="0">
             <a:spAutoFit/>
           </a:bodyPr>
           <a:lstStyle/>
           <a:p>
-            <a:pPr>
+            <a:pPr marL="274320" indent="-274320">
               <a:lnSpc>
                 <a:spcPct val="108000"/>
               </a:lnSpc>
@@ -18227,7 +18254,7 @@
             </a:r>
           </a:p>
           <a:p>
-            <a:pPr>
+            <a:pPr marL="274320" indent="-274320">
               <a:lnSpc>
                 <a:spcPct val="108000"/>
               </a:lnSpc>
@@ -18273,7 +18300,7 @@
             </a:r>
           </a:p>
           <a:p>
-            <a:pPr>
+            <a:pPr marL="274320" indent="-274320">
               <a:lnSpc>
                 <a:spcPct val="108000"/>
               </a:lnSpc>

--- a/claude-code-tutorial/claude-code-tutorial.pptx
+++ b/claude-code-tutorial/claude-code-tutorial.pptx
@@ -822,7 +822,7 @@
           <a:lstStyle/>
           <a:p>
             <a:r>
-              <a:t>This is the roadmap for Parts 3 and 4. Each spoke is a way to shape the harness. One we will not give its own slide: subagents — a scoped helper (say, a reviewer that can only read) that keeps your main session focused. The lab exercises memory, permissions, commands, skills, and MCP; subagents and hooks are covered here in the deck.</a:t>
+              <a:t>This is the roadmap for Parts 3 and 4. Each spoke is a way to shape the harness. One we will not give its own slide: subagents — a scoped helper (say, a reviewer that can only read) that keeps your main session focused. The hands-on lab exercises project memory (CLAUDE.md) and the approve-each-action permission prompt on a real data-analysis task; commands, skills, subagents, and hooks are covered here in the deck.</a:t>
             </a:r>
           </a:p>
         </p:txBody>
@@ -1942,7 +1942,7 @@
           <a:lstStyle/>
           <a:p>
             <a:r>
-              <a:t>Learners copy hands-on/project to a git-clean scratch dir, start claude, and paste the prompt on each task card. The project has three raw CSVs with mismatched columns and units, a planted bug with a failing test, half-finished docs, and free-text field notes — the everyday reality of research data.</a:t>
+              <a:t>The lab is a flat set of Markdown task cards plus a CLAUDE.md naming a hosted CSV (Palmer Penguins). Claude reads the URL, writes and runs pandas analysis, and reports the results — the everyday data-analysis loop. Nothing to download; the node needs internet.</a:t>
             </a:r>
           </a:p>
         </p:txBody>
@@ -2012,7 +2012,7 @@
           <a:lstStyle/>
           <a:p>
             <a:r>
-              <a:t>Each task leaves the project in the state the next one expects. Task 3's bug is a one-line off-by-one in a rolling mean, caught by a failing test — the same pattern the session slide illustrated. The deny rule on the tests demonstrates that a deny is a hard veto.</a:t>
+              <a:t>Each analysis builds on the last. Claude loads the hosted CSV, writes and runs the code, and reports the numbers; the learner reviews and spot-checks. Task 1 also proves CLAUDE.md loaded, via a codename planted there. A headless bonus and a bring-your-own-data take-home follow.</a:t>
             </a:r>
           </a:p>
         </p:txBody>
@@ -2152,7 +2152,7 @@
           <a:lstStyle/>
           <a:p>
             <a:r>
-              <a:t>By the end, attendees can install, use, govern, and scale Claude Code on Midway. The hands-on lab makes each idea concrete on a real project.</a:t>
+              <a:t>By the end, attendees can install, use, govern, and scale Claude Code on Midway. The hands-on lab makes each idea concrete on a real dataset.</a:t>
             </a:r>
           </a:p>
         </p:txBody>
@@ -9536,7 +9536,7 @@
                 </a:solidFill>
                 <a:latin typeface="Arial"/>
               </a:rPr>
-              <a:t>We close with a hands-on lab: you drive Claude Code on a real, messy research project.</a:t>
+              <a:t>We close with a hands-on lab: you drive Claude Code to analyze a real dataset.</a:t>
             </a:r>
           </a:p>
         </p:txBody>
@@ -14207,7 +14207,7 @@
                 </a:solidFill>
                 <a:latin typeface="Arial"/>
               </a:rPr>
-              <a:t>Everything you just saw — on a real, messy research project.</a:t>
+              <a:t>On a real dataset — Claude does the analysis, you review the results.</a:t>
             </a:r>
           </a:p>
         </p:txBody>
@@ -14382,7 +14382,7 @@
                 </a:solidFill>
                 <a:latin typeface="Arial"/>
               </a:rPr>
-              <a:t>The project: LakeWatch</a:t>
+              <a:t>The lab: analyze a real dataset</a:t>
             </a:r>
           </a:p>
         </p:txBody>
@@ -14460,7 +14460,25 @@
                 </a:solidFill>
                 <a:latin typeface="Arial"/>
               </a:rPr>
-              <a:t>A small water-quality project you have just inherited — like most real projects, a little messy.</a:t>
+              <a:t>A flat folder of Markdown task cards and a </a:t>
+            </a:r>
+            <a:r>
+              <a:rPr sz="1250" b="0" i="0">
+                <a:solidFill>
+                  <a:srgbClr val="007482"/>
+                </a:solidFill>
+                <a:latin typeface="Arial"/>
+              </a:rPr>
+              <a:t>CLAUDE.md</a:t>
+            </a:r>
+            <a:r>
+              <a:rPr sz="1250" b="0" i="0">
+                <a:solidFill>
+                  <a:srgbClr val="555A61"/>
+                </a:solidFill>
+                <a:latin typeface="Arial"/>
+              </a:rPr>
+              <a:t> — no notebook, no setup, nothing to download.</a:t>
             </a:r>
           </a:p>
         </p:txBody>
@@ -14511,7 +14529,7 @@
                 </a:solidFill>
                 <a:latin typeface="Arial"/>
               </a:rPr>
-              <a:t>Open it on a scratch copy.</a:t>
+              <a:t>The data lives online.</a:t>
             </a:r>
             <a:r>
               <a:rPr sz="1500" b="0" i="0">
@@ -14529,43 +14547,7 @@
                 </a:solidFill>
                 <a:latin typeface="Arial"/>
               </a:rPr>
-              <a:t>Copy </a:t>
-            </a:r>
-            <a:r>
-              <a:rPr sz="1500" b="0" i="0">
-                <a:solidFill>
-                  <a:srgbClr val="007482"/>
-                </a:solidFill>
-                <a:latin typeface="Arial"/>
-              </a:rPr>
-              <a:t>hands-on/project</a:t>
-            </a:r>
-            <a:r>
-              <a:rPr sz="1500" b="0" i="0">
-                <a:solidFill>
-                  <a:srgbClr val="1E2126"/>
-                </a:solidFill>
-                <a:latin typeface="Arial"/>
-              </a:rPr>
-              <a:t> to a clean dir, start </a:t>
-            </a:r>
-            <a:r>
-              <a:rPr sz="1500" b="0" i="0">
-                <a:solidFill>
-                  <a:srgbClr val="007482"/>
-                </a:solidFill>
-                <a:latin typeface="Arial"/>
-              </a:rPr>
-              <a:t>claude</a:t>
-            </a:r>
-            <a:r>
-              <a:rPr sz="1500" b="0" i="0">
-                <a:solidFill>
-                  <a:srgbClr val="1E2126"/>
-                </a:solidFill>
-                <a:latin typeface="Arial"/>
-              </a:rPr>
-              <a:t> there, and drive the agent — no notebook to run.</a:t>
+              <a:t>Palmer Penguins — 344 field measurements — read straight from a URL.</a:t>
             </a:r>
           </a:p>
           <a:p>
@@ -14593,7 +14575,7 @@
                 </a:solidFill>
                 <a:latin typeface="Arial"/>
               </a:rPr>
-              <a:t>Work the task cards.</a:t>
+              <a:t>You ask; it analyzes.</a:t>
             </a:r>
             <a:r>
               <a:rPr sz="1500" b="0" i="0">
@@ -14611,7 +14593,7 @@
                 </a:solidFill>
                 <a:latin typeface="Arial"/>
               </a:rPr>
-              <a:t>Each card in </a:t>
+              <a:t>Open </a:t>
             </a:r>
             <a:r>
               <a:rPr sz="1500" b="0" i="0">
@@ -14620,7 +14602,7 @@
                 </a:solidFill>
                 <a:latin typeface="Arial"/>
               </a:rPr>
-              <a:t>hands-on/tasks/</a:t>
+              <a:t>claude</a:t>
             </a:r>
             <a:r>
               <a:rPr sz="1500" b="0" i="0">
@@ -14629,7 +14611,25 @@
                 </a:solidFill>
                 <a:latin typeface="Arial"/>
               </a:rPr>
-              <a:t> gives you a prompt to paste, pointing at real files.</a:t>
+              <a:t> in the </a:t>
+            </a:r>
+            <a:r>
+              <a:rPr sz="1500" b="0" i="0">
+                <a:solidFill>
+                  <a:srgbClr val="007482"/>
+                </a:solidFill>
+                <a:latin typeface="Arial"/>
+              </a:rPr>
+              <a:t>hands-on</a:t>
+            </a:r>
+            <a:r>
+              <a:rPr sz="1500" b="0" i="0">
+                <a:solidFill>
+                  <a:srgbClr val="1E2126"/>
+                </a:solidFill>
+                <a:latin typeface="Arial"/>
+              </a:rPr>
+              <a:t> folder and paste each task card — it writes and runs the analysis and reports back.</a:t>
             </a:r>
           </a:p>
           <a:p>
@@ -14657,7 +14657,7 @@
                 </a:solidFill>
                 <a:latin typeface="Arial"/>
               </a:rPr>
-              <a:t>It ships its own guardrails.</a:t>
+              <a:t>You stay the reviewer.</a:t>
             </a:r>
             <a:r>
               <a:rPr sz="1500" b="0" i="0">
@@ -14675,43 +14675,7 @@
                 </a:solidFill>
                 <a:latin typeface="Arial"/>
               </a:rPr>
-              <a:t>A </a:t>
-            </a:r>
-            <a:r>
-              <a:rPr sz="1500" b="0" i="0">
-                <a:solidFill>
-                  <a:srgbClr val="007482"/>
-                </a:solidFill>
-                <a:latin typeface="Arial"/>
-              </a:rPr>
-              <a:t>CLAUDE.md</a:t>
-            </a:r>
-            <a:r>
-              <a:rPr sz="1500" b="0" i="0">
-                <a:solidFill>
-                  <a:srgbClr val="1E2126"/>
-                </a:solidFill>
-                <a:latin typeface="Arial"/>
-              </a:rPr>
-              <a:t>, a </a:t>
-            </a:r>
-            <a:r>
-              <a:rPr sz="1500" b="0" i="0">
-                <a:solidFill>
-                  <a:srgbClr val="007482"/>
-                </a:solidFill>
-                <a:latin typeface="Arial"/>
-              </a:rPr>
-              <a:t>.claude/settings.json</a:t>
-            </a:r>
-            <a:r>
-              <a:rPr sz="1500" b="0" i="0">
-                <a:solidFill>
-                  <a:srgbClr val="1E2126"/>
-                </a:solidFill>
-                <a:latin typeface="Arial"/>
-              </a:rPr>
-              <a:t>, slash commands, and skills — all templates to reuse.</a:t>
+              <a:t>Approve each step, then check its numbers — an agent can be confidently wrong.</a:t>
             </a:r>
           </a:p>
         </p:txBody>
@@ -14876,7 +14840,7 @@
                 </a:solidFill>
                 <a:latin typeface="Arial"/>
               </a:rPr>
-              <a:t>Six short tasks — about 45 minutes — then two optional bonuses: a Slurm batch and your own MCP tool.</a:t>
+              <a:t>Seven short analyses — Claude does the work, you check it — then a bonus on your own data.</a:t>
             </a:r>
           </a:p>
         </p:txBody>
@@ -14891,7 +14855,7 @@
         </p:nvGraphicFramePr>
         <p:xfrm>
           <a:off x="548640" y="1920240"/>
-          <a:ext cx="8046720" cy="2560320"/>
+          <a:ext cx="8046720" cy="2633472"/>
         </p:xfrm>
         <a:graphic>
           <a:graphicData uri="http://schemas.openxmlformats.org/drawingml/2006/table">
@@ -14903,7 +14867,7 @@
                 <a:gridCol w="2715768"/>
                 <a:gridCol w="5330952"/>
               </a:tblGrid>
-              <a:tr h="365760">
+              <a:tr h="329184">
                 <a:tc>
                   <a:txBody>
                     <a:bodyPr wrap="square"/>
@@ -14940,7 +14904,7 @@
                           </a:solidFill>
                           <a:latin typeface="Arial"/>
                         </a:rPr>
-                        <a:t>You will practice</a:t>
+                        <a:t>You practice</a:t>
                       </a:r>
                     </a:p>
                   </a:txBody>
@@ -14951,7 +14915,7 @@
                   </a:tcPr>
                 </a:tc>
               </a:tr>
-              <a:tr h="365760">
+              <a:tr h="329184">
                 <a:tc>
                   <a:txBody>
                     <a:bodyPr wrap="square"/>
@@ -14959,13 +14923,13 @@
                     <a:p>
                       <a:pPr algn="l"/>
                       <a:r>
-                        <a:rPr sz="1150" b="1" i="0">
+                        <a:rPr sz="1100" b="1" i="0">
                           <a:solidFill>
                             <a:srgbClr val="1E2126"/>
                           </a:solidFill>
                           <a:latin typeface="Arial"/>
                         </a:rPr>
-                        <a:t>1 · Get your bearings</a:t>
+                        <a:t>1 · First look</a:t>
                       </a:r>
                     </a:p>
                   </a:txBody>
@@ -14982,13 +14946,13 @@
                     <a:p>
                       <a:pPr algn="l"/>
                       <a:r>
-                        <a:rPr sz="1150" b="0" i="0">
+                        <a:rPr sz="1100" b="0" i="0">
                           <a:solidFill>
                             <a:srgbClr val="1E2126"/>
                           </a:solidFill>
                           <a:latin typeface="Arial"/>
                         </a:rPr>
-                        <a:t>project memory (CLAUDE.md), letting it explore</a:t>
+                        <a:t>reading remote data; project memory (CLAUDE.md)</a:t>
                       </a:r>
                     </a:p>
                   </a:txBody>
@@ -14999,7 +14963,7 @@
                   </a:tcPr>
                 </a:tc>
               </a:tr>
-              <a:tr h="365760">
+              <a:tr h="329184">
                 <a:tc>
                   <a:txBody>
                     <a:bodyPr wrap="square"/>
@@ -15007,13 +14971,13 @@
                     <a:p>
                       <a:pPr algn="l"/>
                       <a:r>
-                        <a:rPr sz="1150" b="1" i="0">
+                        <a:rPr sz="1100" b="1" i="0">
                           <a:solidFill>
                             <a:srgbClr val="1E2126"/>
                           </a:solidFill>
                           <a:latin typeface="Arial"/>
                         </a:rPr>
-                        <a:t>2 · Tidy the messy data</a:t>
+                        <a:t>2 · Summary by species</a:t>
                       </a:r>
                     </a:p>
                   </a:txBody>
@@ -15030,13 +14994,13 @@
                     <a:p>
                       <a:pPr algn="l"/>
                       <a:r>
-                        <a:rPr sz="1150" b="0" i="0">
+                        <a:rPr sz="1100" b="0" i="0">
                           <a:solidFill>
                             <a:srgbClr val="1E2126"/>
                           </a:solidFill>
                           <a:latin typeface="Arial"/>
                         </a:rPr>
-                        <a:t>Plan mode → Accept-edits; raw data stays read-only</a:t>
+                        <a:t>group-and-summarize, reported as a table</a:t>
                       </a:r>
                     </a:p>
                   </a:txBody>
@@ -15047,7 +15011,7 @@
                   </a:tcPr>
                 </a:tc>
               </a:tr>
-              <a:tr h="365760">
+              <a:tr h="329184">
                 <a:tc>
                   <a:txBody>
                     <a:bodyPr wrap="square"/>
@@ -15055,13 +15019,13 @@
                     <a:p>
                       <a:pPr algn="l"/>
                       <a:r>
-                        <a:rPr sz="1150" b="1" i="0">
+                        <a:rPr sz="1100" b="1" i="0">
                           <a:solidFill>
                             <a:srgbClr val="1E2126"/>
                           </a:solidFill>
                           <a:latin typeface="Arial"/>
                         </a:rPr>
-                        <a:t>3 · Fix the bug — safely</a:t>
+                        <a:t>3 · The heaviest species</a:t>
                       </a:r>
                     </a:p>
                   </a:txBody>
@@ -15078,13 +15042,13 @@
                     <a:p>
                       <a:pPr algn="l"/>
                       <a:r>
-                        <a:rPr sz="1150" b="0" i="0">
+                        <a:rPr sz="1100" b="0" i="0">
                           <a:solidFill>
                             <a:srgbClr val="1E2126"/>
                           </a:solidFill>
                           <a:latin typeface="Arial"/>
                         </a:rPr>
-                        <a:t>a guarded autonomous fix you verify yourself</a:t>
+                        <a:t>a comparison and a judgment call</a:t>
                       </a:r>
                     </a:p>
                   </a:txBody>
@@ -15095,7 +15059,7 @@
                   </a:tcPr>
                 </a:tc>
               </a:tr>
-              <a:tr h="365760">
+              <a:tr h="329184">
                 <a:tc>
                   <a:txBody>
                     <a:bodyPr wrap="square"/>
@@ -15103,13 +15067,13 @@
                     <a:p>
                       <a:pPr algn="l"/>
                       <a:r>
-                        <a:rPr sz="1150" b="1" i="0">
+                        <a:rPr sz="1100" b="1" i="0">
                           <a:solidFill>
                             <a:srgbClr val="1E2126"/>
                           </a:solidFill>
                           <a:latin typeface="Arial"/>
                         </a:rPr>
-                        <a:t>4 · Document the project</a:t>
+                        <a:t>4 · Flipper vs body mass</a:t>
                       </a:r>
                     </a:p>
                   </a:txBody>
@@ -15126,13 +15090,13 @@
                     <a:p>
                       <a:pPr algn="l"/>
                       <a:r>
-                        <a:rPr sz="1150" b="0" i="0">
+                        <a:rPr sz="1100" b="0" i="0">
                           <a:solidFill>
                             <a:srgbClr val="1E2126"/>
                           </a:solidFill>
                           <a:latin typeface="Arial"/>
                         </a:rPr>
-                        <a:t>the writing around research; you are the reviewer</a:t>
+                        <a:t>correlations — overall and within groups</a:t>
                       </a:r>
                     </a:p>
                   </a:txBody>
@@ -15143,7 +15107,7 @@
                   </a:tcPr>
                 </a:tc>
               </a:tr>
-              <a:tr h="365760">
+              <a:tr h="329184">
                 <a:tc>
                   <a:txBody>
                     <a:bodyPr wrap="square"/>
@@ -15151,13 +15115,13 @@
                     <a:p>
                       <a:pPr algn="l"/>
                       <a:r>
-                        <a:rPr sz="1150" b="1" i="0">
+                        <a:rPr sz="1100" b="1" i="0">
                           <a:solidFill>
                             <a:srgbClr val="1E2126"/>
                           </a:solidFill>
                           <a:latin typeface="Arial"/>
                         </a:rPr>
-                        <a:t>5 · Turn notes into data</a:t>
+                        <a:t>5 · Data quality</a:t>
                       </a:r>
                     </a:p>
                   </a:txBody>
@@ -15174,13 +15138,13 @@
                     <a:p>
                       <a:pPr algn="l"/>
                       <a:r>
-                        <a:rPr sz="1150" b="0" i="0">
+                        <a:rPr sz="1100" b="0" i="0">
                           <a:solidFill>
                             <a:srgbClr val="1E2126"/>
                           </a:solidFill>
                           <a:latin typeface="Arial"/>
                         </a:rPr>
-                        <a:t>structured extraction from documents</a:t>
+                        <a:t>spotting missing / odd values (without dropping them)</a:t>
                       </a:r>
                     </a:p>
                   </a:txBody>
@@ -15191,7 +15155,7 @@
                   </a:tcPr>
                 </a:tc>
               </a:tr>
-              <a:tr h="365760">
+              <a:tr h="329184">
                 <a:tc>
                   <a:txBody>
                     <a:bodyPr wrap="square"/>
@@ -15199,13 +15163,13 @@
                     <a:p>
                       <a:pPr algn="l"/>
                       <a:r>
-                        <a:rPr sz="1150" b="1" i="0">
+                        <a:rPr sz="1100" b="1" i="0">
                           <a:solidFill>
                             <a:srgbClr val="1E2126"/>
                           </a:solidFill>
                           <a:latin typeface="Arial"/>
                         </a:rPr>
-                        <a:t>6 · Automate it</a:t>
+                        <a:t>6 · Make a figure</a:t>
                       </a:r>
                     </a:p>
                   </a:txBody>
@@ -15222,19 +15186,67 @@
                     <a:p>
                       <a:pPr algn="l"/>
                       <a:r>
-                        <a:rPr sz="1150" b="0" i="0">
+                        <a:rPr sz="1100" b="0" i="0">
                           <a:solidFill>
                             <a:srgbClr val="1E2126"/>
                           </a:solidFill>
                           <a:latin typeface="Arial"/>
                         </a:rPr>
-                        <a:t>a slash command, and a skill the model reaches for</a:t>
+                        <a:t>write + run a plotting script → a saved figure</a:t>
                       </a:r>
                     </a:p>
                   </a:txBody>
                   <a:tcPr marL="128016" marR="91440" marT="45720" marB="45720" anchor="ctr">
                     <a:solidFill>
                       <a:srgbClr val="EEF2FB"/>
+                    </a:solidFill>
+                  </a:tcPr>
+                </a:tc>
+              </a:tr>
+              <a:tr h="329184">
+                <a:tc>
+                  <a:txBody>
+                    <a:bodyPr wrap="square"/>
+                    <a:lstStyle/>
+                    <a:p>
+                      <a:pPr algn="l"/>
+                      <a:r>
+                        <a:rPr sz="1100" b="1" i="0">
+                          <a:solidFill>
+                            <a:srgbClr val="1E2126"/>
+                          </a:solidFill>
+                          <a:latin typeface="Arial"/>
+                        </a:rPr>
+                        <a:t>7 · Write it up</a:t>
+                      </a:r>
+                    </a:p>
+                  </a:txBody>
+                  <a:tcPr marL="128016" marR="91440" marT="45720" marB="45720" anchor="ctr">
+                    <a:solidFill>
+                      <a:srgbClr val="FFFFFF"/>
+                    </a:solidFill>
+                  </a:tcPr>
+                </a:tc>
+                <a:tc>
+                  <a:txBody>
+                    <a:bodyPr wrap="square"/>
+                    <a:lstStyle/>
+                    <a:p>
+                      <a:pPr algn="l"/>
+                      <a:r>
+                        <a:rPr sz="1100" b="0" i="0">
+                          <a:solidFill>
+                            <a:srgbClr val="1E2126"/>
+                          </a:solidFill>
+                          <a:latin typeface="Arial"/>
+                        </a:rPr>
+                        <a:t>turn the numbers into a Results paragraph</a:t>
+                      </a:r>
+                    </a:p>
+                  </a:txBody>
+                  <a:tcPr marL="128016" marR="91440" marT="45720" marB="45720" anchor="ctr">
+                    <a:solidFill>
+                      <a:srgbClr val="FFFFFF"/>
                     </a:solidFill>
                   </a:tcPr>
                 </a:tc>

--- a/claude-code-tutorial/claude-code-tutorial.pptx
+++ b/claude-code-tutorial/claude-code-tutorial.pptx
@@ -14460,7 +14460,7 @@
                 </a:solidFill>
                 <a:latin typeface="Arial"/>
               </a:rPr>
-              <a:t>A flat folder of Markdown task cards and a </a:t>
+              <a:t>A flat folder: Markdown task cards, a </a:t>
             </a:r>
             <a:r>
               <a:rPr sz="1250" b="0" i="0">
@@ -14478,7 +14478,25 @@
                 </a:solidFill>
                 <a:latin typeface="Arial"/>
               </a:rPr>
-              <a:t> — no notebook, no setup, nothing to download.</a:t>
+              <a:t>, and an </a:t>
+            </a:r>
+            <a:r>
+              <a:rPr sz="1250" b="0" i="0">
+                <a:solidFill>
+                  <a:srgbClr val="007482"/>
+                </a:solidFill>
+                <a:latin typeface="Arial"/>
+              </a:rPr>
+              <a:t>answers.py</a:t>
+            </a:r>
+            <a:r>
+              <a:rPr sz="1250" b="0" i="0">
+                <a:solidFill>
+                  <a:srgbClr val="555A61"/>
+                </a:solidFill>
+                <a:latin typeface="Arial"/>
+              </a:rPr>
+              <a:t> key — no notebook, nothing to download.</a:t>
             </a:r>
           </a:p>
         </p:txBody>
